--- a/Presentatie_Computervisie.pptx
+++ b/Presentatie_Computervisie.pptx
@@ -144,6 +144,7 @@
     <p1510:client id="{A1D93A34-BC18-0903-88F2-60068C6A73C9}" v="30" dt="2025-06-11T07:03:49.278"/>
     <p1510:client id="{A89A4401-1395-8CAE-BAAD-DF20B2BAC478}" v="18" dt="2025-06-10T16:15:07.076"/>
     <p1510:client id="{AD212EC7-1E5B-0135-4CE5-C170B72A76AB}" v="452" dt="2025-06-09T18:50:02.466"/>
+    <p1510:client id="{F7BCBAB3-A3AB-9A42-D486-95B1768C68AC}" v="38" dt="2025-06-11T11:04:04.094"/>
   </p1510:revLst>
 </p1510:revInfo>
 </file>
@@ -5256,15 +5257,15 @@
           <a:lstStyle/>
           <a:p>
             <a:r>
-              <a:rPr lang="en-US" dirty="0">
+              <a:rPr lang="en-US">
                 <a:latin typeface="UGent Panno Text"/>
               </a:rPr>
               <a:t>Tree Detection</a:t>
             </a:r>
-            <a:endParaRPr lang="en-BE" dirty="0"/>
-          </a:p>
-          <a:p>
-            <a:endParaRPr lang="en-US" dirty="0"/>
+            <a:endParaRPr lang="en-BE"/>
+          </a:p>
+          <a:p>
+            <a:endParaRPr lang="en-US"/>
           </a:p>
         </p:txBody>
       </p:sp>
@@ -5686,12 +5687,12 @@
           <a:lstStyle/>
           <a:p>
             <a:r>
-              <a:rPr lang="en-US" dirty="0">
+              <a:rPr lang="en-US">
                 <a:latin typeface="UGent Panno Text"/>
               </a:rPr>
               <a:t>Tree Detection </a:t>
             </a:r>
-            <a:endParaRPr lang="en-US" dirty="0"/>
+            <a:endParaRPr lang="en-US"/>
           </a:p>
         </p:txBody>
       </p:sp>
@@ -8102,10 +8103,12 @@
           <a:lstStyle/>
           <a:p>
             <a:r>
-              <a:rPr lang="en-US"/>
-              <a:t>Conclusion</a:t>
-            </a:r>
-            <a:endParaRPr lang="en-BE"/>
+              <a:rPr lang="en-US" dirty="0">
+                <a:latin typeface="UGent Panno Text"/>
+              </a:rPr>
+              <a:t>Conclusion &amp; Future Expansion</a:t>
+            </a:r>
+            <a:endParaRPr lang="en-BE" dirty="0"/>
           </a:p>
         </p:txBody>
       </p:sp>
@@ -9424,7 +9427,7 @@
           <a:p>
             <a:pPr marL="466725" lvl="1" indent="-457200"/>
             <a:r>
-              <a:rPr lang="en-BE">
+              <a:rPr lang="en-BE" dirty="0">
                 <a:latin typeface="UGent Panno Text"/>
               </a:rPr>
               <a:t>Introduction</a:t>
@@ -9433,52 +9436,75 @@
           <a:p>
             <a:pPr marL="466725" lvl="1" indent="-457200"/>
             <a:r>
-              <a:rPr lang="en-BE">
+              <a:rPr lang="en-BE" dirty="0">
                 <a:latin typeface="UGent Panno Text"/>
               </a:rPr>
               <a:t>Overview – System Workflow</a:t>
             </a:r>
-            <a:endParaRPr lang="en-BE"/>
+            <a:endParaRPr lang="en-BE" dirty="0"/>
           </a:p>
           <a:p>
             <a:pPr marL="466725" lvl="1" indent="-457200"/>
             <a:r>
-              <a:rPr lang="en-BE">
+              <a:rPr lang="en-BE" dirty="0">
                 <a:latin typeface="UGent Panno Text"/>
               </a:rPr>
               <a:t>Camera Calibration &amp; Tree Detection</a:t>
             </a:r>
-            <a:endParaRPr lang="en-BE"/>
+            <a:endParaRPr lang="en-BE" dirty="0"/>
           </a:p>
           <a:p>
             <a:pPr marL="466725" lvl="1" indent="-457200"/>
             <a:r>
-              <a:rPr lang="en-BE">
+              <a:rPr lang="en-BE" dirty="0">
                 <a:latin typeface="UGent Panno Text"/>
               </a:rPr>
               <a:t>Tree Tracking &amp; ID Assignment</a:t>
             </a:r>
-            <a:endParaRPr lang="en-BE"/>
+            <a:endParaRPr lang="en-BE" dirty="0"/>
           </a:p>
           <a:p>
             <a:pPr marL="466725" lvl="1" indent="-457200"/>
             <a:r>
-              <a:rPr lang="en-BE">
+              <a:rPr lang="en-BE" dirty="0">
                 <a:latin typeface="UGent Panno Text"/>
               </a:rPr>
               <a:t>Path Reconstruction</a:t>
             </a:r>
-            <a:endParaRPr lang="en-BE"/>
+            <a:endParaRPr lang="en-BE" dirty="0"/>
           </a:p>
           <a:p>
             <a:pPr marL="466725" lvl="1" indent="-457200"/>
             <a:r>
-              <a:rPr lang="en-BE">
+              <a:rPr lang="en-BE" dirty="0">
                 <a:latin typeface="UGent Panno Text"/>
               </a:rPr>
               <a:t>3D Localization &amp; DBH Estimation</a:t>
             </a:r>
-            <a:endParaRPr lang="en-BE"/>
+            <a:endParaRPr lang="en-BE" dirty="0"/>
+          </a:p>
+          <a:p>
+            <a:pPr marL="466725" lvl="1" indent="-457200">
+              <a:buFont typeface="Arial" panose="020B0604020202020204" pitchFamily="34" charset="0"/>
+              <a:buChar char="•"/>
+            </a:pPr>
+            <a:r>
+              <a:rPr lang="en-BE" dirty="0">
+                <a:latin typeface="UGent Panno Text"/>
+              </a:rPr>
+              <a:t>Results</a:t>
+            </a:r>
+            <a:endParaRPr lang="en-BE" dirty="0"/>
+          </a:p>
+          <a:p>
+            <a:pPr marL="466725" lvl="1" indent="-457200"/>
+            <a:r>
+              <a:rPr lang="en-BE" dirty="0">
+                <a:latin typeface="UGent Panno Text"/>
+              </a:rPr>
+              <a:t>Conclusion &amp; Future Work</a:t>
+            </a:r>
+            <a:endParaRPr lang="en-BE" dirty="0"/>
           </a:p>
           <a:p>
             <a:pPr marL="457200" indent="-457200">
@@ -9900,7 +9926,12 @@
             <p:ph type="body" sz="quarter" idx="11"/>
           </p:nvPr>
         </p:nvSpPr>
-        <p:spPr/>
+        <p:spPr>
+          <a:xfrm>
+            <a:off x="554196" y="1919032"/>
+            <a:ext cx="5632959" cy="3597780"/>
+          </a:xfrm>
+        </p:spPr>
         <p:txBody>
           <a:bodyPr/>
           <a:lstStyle/>
@@ -11074,7 +11105,7 @@
           <a:p>
             <a:pPr marL="466725" lvl="1" indent="-457200"/>
             <a:r>
-              <a:rPr lang="en-US" dirty="0">
+              <a:rPr lang="en-US">
                 <a:latin typeface="UGent Panno Text"/>
               </a:rPr>
               <a:t>Camera’s internal characteristics</a:t>
@@ -11083,7 +11114,7 @@
           <a:p>
             <a:pPr marL="466725" lvl="1" indent="-457200"/>
             <a:r>
-              <a:rPr lang="en-US" dirty="0">
+              <a:rPr lang="en-US">
                 <a:latin typeface="UGent Panno Text"/>
               </a:rPr>
               <a:t>checkerboard pattern </a:t>
@@ -11092,13 +11123,13 @@
           <a:p>
             <a:pPr marL="466725" lvl="1" indent="-457200"/>
             <a:r>
-              <a:rPr lang="en-US" dirty="0">
+              <a:rPr lang="en-US">
                 <a:latin typeface="UGent Panno Text"/>
               </a:rPr>
               <a:t>Image and point </a:t>
             </a:r>
             <a:r>
-              <a:rPr lang="en-US" dirty="0" err="1">
+              <a:rPr lang="en-US" err="1">
                 <a:latin typeface="UGent Panno Text"/>
               </a:rPr>
               <a:t>undistortion</a:t>
@@ -11139,12 +11170,12 @@
           <a:lstStyle/>
           <a:p>
             <a:r>
-              <a:rPr lang="en-US" dirty="0">
+              <a:rPr lang="en-US">
                 <a:latin typeface="UGent Panno Text"/>
               </a:rPr>
               <a:t>Camera Calibration </a:t>
             </a:r>
-            <a:endParaRPr lang="en-BE" dirty="0"/>
+            <a:endParaRPr lang="en-BE"/>
           </a:p>
         </p:txBody>
       </p:sp>
